--- a/templates/posts/november/05-11-2026-thu-li-fertilizer-response.pptx
+++ b/templates/posts/november/05-11-2026-thu-li-fertilizer-response.pptx
@@ -3510,7 +3510,7 @@
       <p:grpSpPr/>
       <p:pic>
         <p:nvPicPr>
-          <p:cNvPr id="2" name="Picture 1" descr="3879256100683048624.jpg"/>
+          <p:cNvPr id="2" name="Picture 1" descr="2685228379520882982.jpg"/>
           <p:cNvPicPr>
             <a:picLocks noChangeAspect="1"/>
           </p:cNvPicPr>
